--- a/tasks/finalpool/yf-gold-vs-stocks-ppt/groundtruth_workspace/Gold_vs_Stocks.pptx
+++ b/tasks/finalpool/yf-gold-vs-stocks-ppt/groundtruth_workspace/Gold_vs_Stocks.pptx
@@ -8,7 +8,6 @@
     <p:sldId id="256" r:id="rId7"/>
     <p:sldId id="257" r:id="rId8"/>
     <p:sldId id="258" r:id="rId9"/>
-    <p:sldId id="259" r:id="rId10"/>
   </p:sldIdLst>
   <p:sldSz cx="9144000" cy="6858000" type="screen4x3"/>
   <p:notesSz cx="6858000" cy="9144000"/>
@@ -3107,7 +3106,7 @@
           <a:lstStyle/>
           <a:p>
             <a:r>
-              <a:t>Gold vs DJI Comparison</a:t>
+              <a:t>Gold vs Stock Market Performance</a:t>
             </a:r>
           </a:p>
         </p:txBody>
@@ -3128,7 +3127,7 @@
           <a:lstStyle/>
           <a:p>
             <a:r>
-              <a:t>Monthly Performance Analysis | 2024-2026</a:t>
+              <a:t>Analysis covers March 2025 to March 2026</a:t>
             </a:r>
           </a:p>
         </p:txBody>
@@ -3167,28 +3166,65 @@
           <a:lstStyle/>
           <a:p>
             <a:r>
-              <a:t>Gold Price Performance</a:t>
-            </a:r>
-          </a:p>
-        </p:txBody>
-      </p:sp>
-      <p:sp>
-        <p:nvSpPr>
-          <p:cNvPr id="3" name="Content Placeholder 2"/>
-          <p:cNvSpPr>
-            <a:spLocks noGrp="1"/>
-          </p:cNvSpPr>
-          <p:nvPr>
-            <p:ph idx="1"/>
-          </p:nvPr>
-        </p:nvSpPr>
-        <p:spPr/>
-        <p:txBody>
-          <a:bodyPr/>
-          <a:lstStyle/>
-          <a:p>
-            <a:r>
-              <a:t>Gold prices ranged from approximately $2,000 to $3,100 over the analysis period, showing strong upward trend.</a:t>
+              <a:t>Monthly Price Comparison</a:t>
+            </a:r>
+          </a:p>
+        </p:txBody>
+      </p:sp>
+      <p:sp>
+        <p:nvSpPr>
+          <p:cNvPr id="3" name="TextBox 2"/>
+          <p:cNvSpPr txBox="1"/>
+          <p:nvPr/>
+        </p:nvSpPr>
+        <p:spPr>
+          <a:xfrm>
+            <a:off x="457200" y="1371600"/>
+            <a:ext cx="8229600" cy="4572000"/>
+          </a:xfrm>
+          <a:prstGeom prst="rect">
+            <a:avLst/>
+          </a:prstGeom>
+          <a:noFill/>
+        </p:spPr>
+        <p:txBody>
+          <a:bodyPr wrap="none">
+            <a:spAutoFit/>
+          </a:bodyPr>
+          <a:lstStyle/>
+          <a:p>
+            <a:r>
+              <a:t>Month | Gold_Close | DJI_Close</a:t>
+            </a:r>
+          </a:p>
+          <a:p>
+            <a:r>
+              <a:t>2025-03 | 3122.80 | 42001.76</a:t>
+            </a:r>
+          </a:p>
+          <a:p>
+            <a:r>
+              <a:t>2025-04 | 3305.00 | 40669.36</a:t>
+            </a:r>
+          </a:p>
+          <a:p>
+            <a:r>
+              <a:t>2025-05 | 3288.90 | 42270.07</a:t>
+            </a:r>
+          </a:p>
+          <a:p>
+            <a:r>
+              <a:t>2026-01 | 4713.90 | 48892.47</a:t>
+            </a:r>
+          </a:p>
+          <a:p>
+            <a:r>
+              <a:t>2026-02 | 5230.50 | 48977.92</a:t>
+            </a:r>
+          </a:p>
+          <a:p>
+            <a:r>
+              <a:t>2026-03 | 5093.30 | 47954.74</a:t>
             </a:r>
           </a:p>
         </p:txBody>
@@ -3227,88 +3263,35 @@
           <a:lstStyle/>
           <a:p>
             <a:r>
-              <a:t>DJI vs Gold Returns Comparison</a:t>
-            </a:r>
-          </a:p>
-        </p:txBody>
-      </p:sp>
-      <p:sp>
-        <p:nvSpPr>
-          <p:cNvPr id="3" name="Content Placeholder 2"/>
-          <p:cNvSpPr>
-            <a:spLocks noGrp="1"/>
-          </p:cNvSpPr>
-          <p:nvPr>
-            <p:ph idx="1"/>
-          </p:nvPr>
-        </p:nvSpPr>
-        <p:spPr/>
-        <p:txBody>
-          <a:bodyPr/>
-          <a:lstStyle/>
-          <a:p>
-            <a:r>
-              <a:t>Comparative monthly returns show that gold outperformed DJI in 8 out of 12 months. Gold showed lower volatility and stronger safe-haven characteristics.</a:t>
-            </a:r>
-          </a:p>
-        </p:txBody>
-      </p:sp>
-    </p:spTree>
-  </p:cSld>
-  <p:clrMapOvr>
-    <a:masterClrMapping/>
-  </p:clrMapOvr>
-</p:sld>
-</file>
-
-<file path=ppt/slides/slide4.xml><?xml version="1.0" encoding="utf-8"?>
-<p:sld xmlns:a="http://schemas.openxmlformats.org/drawingml/2006/main" xmlns:p="http://schemas.openxmlformats.org/presentationml/2006/main" xmlns:r="http://schemas.openxmlformats.org/officeDocument/2006/relationships">
-  <p:cSld>
-    <p:spTree>
-      <p:nvGrpSpPr>
-        <p:cNvPr id="1" name=""/>
-        <p:cNvGrpSpPr/>
-        <p:nvPr/>
-      </p:nvGrpSpPr>
-      <p:grpSpPr/>
-      <p:sp>
-        <p:nvSpPr>
-          <p:cNvPr id="2" name="Title 1"/>
-          <p:cNvSpPr>
-            <a:spLocks noGrp="1"/>
-          </p:cNvSpPr>
-          <p:nvPr>
-            <p:ph type="title"/>
-          </p:nvPr>
-        </p:nvSpPr>
-        <p:spPr/>
-        <p:txBody>
-          <a:bodyPr/>
-          <a:lstStyle/>
-          <a:p>
-            <a:r>
-              <a:t>Summary and Conclusions</a:t>
-            </a:r>
-          </a:p>
-        </p:txBody>
-      </p:sp>
-      <p:sp>
-        <p:nvSpPr>
-          <p:cNvPr id="3" name="Content Placeholder 2"/>
-          <p:cNvSpPr>
-            <a:spLocks noGrp="1"/>
-          </p:cNvSpPr>
-          <p:nvPr>
-            <p:ph idx="1"/>
-          </p:nvPr>
-        </p:nvSpPr>
-        <p:spPr/>
-        <p:txBody>
-          <a:bodyPr/>
-          <a:lstStyle/>
-          <a:p>
-            <a:r>
-              <a:t>Gold provides portfolio diversification benefits. Recommend 10-15% allocation to gold as hedge against equity volatility.</a:t>
+              <a:t>Conclusion</a:t>
+            </a:r>
+          </a:p>
+        </p:txBody>
+      </p:sp>
+      <p:sp>
+        <p:nvSpPr>
+          <p:cNvPr id="3" name="TextBox 2"/>
+          <p:cNvSpPr txBox="1"/>
+          <p:nvPr/>
+        </p:nvSpPr>
+        <p:spPr>
+          <a:xfrm>
+            <a:off x="457200" y="1371600"/>
+            <a:ext cx="8229600" cy="4572000"/>
+          </a:xfrm>
+          <a:prstGeom prst="rect">
+            <a:avLst/>
+          </a:prstGeom>
+          <a:noFill/>
+        </p:spPr>
+        <p:txBody>
+          <a:bodyPr wrap="none">
+            <a:spAutoFit/>
+          </a:bodyPr>
+          <a:lstStyle/>
+          <a:p>
+            <a:r>
+              <a:t>Over the twelve-month period from March 2025 to March 2026, Gold performed better. Gold returned 63.10% while DJI returned 14.17%.</a:t>
             </a:r>
           </a:p>
         </p:txBody>
